--- a/frontend/Rencipe_Phase_1_Demo_Plan.pptx
+++ b/frontend/Rencipe_Phase_1_Demo_Plan.pptx
@@ -85,7 +85,7 @@
 </file>
 
 <file path=ppt/slides/slide1.xml><?xml version="1.0" encoding="utf-8"?>
-<p:sld xmlns:a="http://schemas.openxmlformats.org/drawingml/2006/main" xmlns:r="http://schemas.openxmlformats.org/officeDocument/2006/relationships" xmlns:p="http://schemas.openxmlformats.org/presentationml/2006/main">
+<p:sld xmlns:a="http://schemas.openxmlformats.org/drawingml/2006/main" xmlns:p="http://schemas.openxmlformats.org/presentationml/2006/main" xmlns:r="http://schemas.openxmlformats.org/officeDocument/2006/relationships">
   <p:cSld>
     <p:bg>
       <p:bgPr>
@@ -173,7 +173,7 @@
                   <a:srgbClr val="475569"/>
                 </a:solidFill>
               </a:rPr>
-              <a:t>20-minute CPSC 597 walkthrough with current app screenshots</a:t>
+              <a:t>Recipe basics, search, settings, and meal planning walkthrough with fresh screenshots</a:t>
             </a:r>
             <a:endParaRPr lang="en-US"/>
           </a:p>
@@ -246,36 +246,39 @@
                   <a:srgbClr val="0F172A"/>
                 </a:solidFill>
               </a:rPr>
-              <a:t>Key message:</a:t>
-            </a:r>
-            <a:endParaRPr lang="en-US"/>
-          </a:p>
-          <a:p>
-            <a:r>
-              <a:rPr lang="en-US" sz="1320">
-                <a:solidFill>
-                  <a:srgbClr val="334155"/>
-                </a:solidFill>
-              </a:rPr>
-              <a:t>- Rencipe connects recipe discovery, saving, cart collection, and household meal planning.</a:t>
-            </a:r>
-            <a:endParaRPr lang="en-US"/>
-          </a:p>
-          <a:p>
-            <a:r>
-              <a:rPr lang="en-US" sz="1320">
-                <a:solidFill>
-                  <a:srgbClr val="334155"/>
-                </a:solidFill>
-              </a:rPr>
-              <a:t>- The demo now shows backend login, role-based recipe visibility, and the live deployed app.</a:t>
+              <a:t>0:00-0:45
+Key message:
+- Rencipe connects recipe discovery, saving, cart collection, and day-by-day household meal planning.
+- The walkthrough follows the same order as the live presentation.</a:t>
+            </a:r>
+            <a:endParaRPr lang="en-US"/>
+          </a:p>
+          <a:p>
+            <a:r>
+              <a:rPr lang="en-US" sz="1320">
+                <a:solidFill>
+                  <a:srgbClr val="334155"/>
+                </a:solidFill>
+              </a:rPr>
+              <a:t/>
+            </a:r>
+            <a:endParaRPr lang="en-US"/>
+          </a:p>
+          <a:p>
+            <a:r>
+              <a:rPr lang="en-US" sz="1320">
+                <a:solidFill>
+                  <a:srgbClr val="334155"/>
+                </a:solidFill>
+              </a:rPr>
+              <a:t/>
             </a:r>
             <a:endParaRPr lang="en-US"/>
           </a:p>
           <a:p>
             <a:r>
               <a:rPr lang="en-US" sz="700"/>
-              <a:t> </a:t>
+              <a:t/>
             </a:r>
           </a:p>
           <a:p>
@@ -285,40 +288,75 @@
                   <a:srgbClr val="0F172A"/>
                 </a:solidFill>
               </a:rPr>
-              <a:t>Required output:</a:t>
-            </a:r>
-            <a:endParaRPr lang="en-US"/>
-          </a:p>
-          <a:p>
-            <a:r>
-              <a:rPr lang="en-US" sz="1320">
-                <a:solidFill>
-                  <a:srgbClr val="334155"/>
-                </a:solidFill>
-              </a:rPr>
-              <a:t>- PowerPoint deck with screenshots.</a:t>
-            </a:r>
-            <a:endParaRPr lang="en-US"/>
-          </a:p>
-          <a:p>
-            <a:r>
-              <a:rPr lang="en-US" sz="1320">
-                <a:solidFill>
-                  <a:srgbClr val="334155"/>
-                </a:solidFill>
-              </a:rPr>
-              <a:t>- Recorded video presentation.</a:t>
-            </a:r>
-            <a:endParaRPr lang="en-US"/>
-          </a:p>
-          <a:p>
-            <a:r>
-              <a:rPr lang="en-US" sz="1320">
-                <a:solidFill>
-                  <a:srgbClr val="334155"/>
-                </a:solidFill>
-              </a:rPr>
-              <a:t>- Project outcomes demo within about 20 minutes.</a:t>
+              <a:t/>
+            </a:r>
+            <a:endParaRPr lang="en-US"/>
+          </a:p>
+          <a:p>
+            <a:r>
+              <a:rPr lang="en-US" sz="1320">
+                <a:solidFill>
+                  <a:srgbClr val="334155"/>
+                </a:solidFill>
+              </a:rPr>
+              <a:t/>
+            </a:r>
+            <a:endParaRPr lang="en-US"/>
+          </a:p>
+          <a:p>
+            <a:r>
+              <a:rPr lang="en-US" sz="1320">
+                <a:solidFill>
+                  <a:srgbClr val="334155"/>
+                </a:solidFill>
+              </a:rPr>
+              <a:t/>
+            </a:r>
+            <a:endParaRPr lang="en-US"/>
+          </a:p>
+          <a:p>
+            <a:r>
+              <a:rPr lang="en-US" sz="1320">
+                <a:solidFill>
+                  <a:srgbClr val="334155"/>
+                </a:solidFill>
+              </a:rPr>
+              <a:t/>
+            </a:r>
+            <a:endParaRPr lang="en-US"/>
+          </a:p>
+        </p:txBody>
+      </p:sp>
+      <p:sp>
+        <p:nvSpPr>
+          <p:cNvPr id="20" name="Footer"/>
+          <p:cNvSpPr txBox="1"/>
+          <p:nvPr/>
+        </p:nvSpPr>
+        <p:spPr>
+          <a:xfrm>
+            <a:off x="530352" y="5833872"/>
+            <a:ext cx="4572000" cy="201168"/>
+          </a:xfrm>
+          <a:prstGeom prst="rect">
+            <a:avLst/>
+          </a:prstGeom>
+          <a:noFill/>
+          <a:ln>
+            <a:noFill/>
+          </a:ln>
+        </p:spPr>
+        <p:txBody>
+          <a:bodyPr wrap="square" lIns="91440" tIns="73152" rIns="91440" bIns="73152"/>
+          <a:lstStyle/>
+          <a:p>
+            <a:r>
+              <a:rPr lang="en-US" sz="850">
+                <a:solidFill>
+                  <a:srgbClr val="94A3B8"/>
+                </a:solidFill>
+              </a:rPr>
+              <a:t>Slide 1 of 12 | Rencipe Phase 1 demo plan</a:t>
             </a:r>
             <a:endParaRPr lang="en-US"/>
           </a:p>
@@ -326,7 +364,7 @@
       </p:sp>
       <p:pic>
         <p:nvPicPr>
-          <p:cNvPr id="9" name="ppt-home.png"/>
+          <p:cNvPr id="21" name="ppt-home.png"/>
           <p:cNvPicPr>
             <a:picLocks noChangeAspect="1"/>
           </p:cNvPicPr>
@@ -353,41 +391,6 @@
           </a:ln>
         </p:spPr>
       </p:pic>
-      <p:sp>
-        <p:nvSpPr>
-          <p:cNvPr id="20" name="Footer"/>
-          <p:cNvSpPr txBox="1"/>
-          <p:nvPr/>
-        </p:nvSpPr>
-        <p:spPr>
-          <a:xfrm>
-            <a:off x="530352" y="5833872"/>
-            <a:ext cx="4572000" cy="201168"/>
-          </a:xfrm>
-          <a:prstGeom prst="rect">
-            <a:avLst/>
-          </a:prstGeom>
-          <a:noFill/>
-          <a:ln>
-            <a:noFill/>
-          </a:ln>
-        </p:spPr>
-        <p:txBody>
-          <a:bodyPr wrap="square" lIns="91440" tIns="73152" rIns="91440" bIns="73152"/>
-          <a:lstStyle/>
-          <a:p>
-            <a:r>
-              <a:rPr lang="en-US" sz="850">
-                <a:solidFill>
-                  <a:srgbClr val="94A3B8"/>
-                </a:solidFill>
-              </a:rPr>
-              <a:t>Slide 1 of 12 | Rencipe Phase 1 demo plan</a:t>
-            </a:r>
-            <a:endParaRPr lang="en-US"/>
-          </a:p>
-        </p:txBody>
-      </p:sp>
     </p:spTree>
   </p:cSld>
   <p:clrMapOvr>
@@ -397,7 +400,7 @@
 </file>
 
 <file path=ppt/slides/slide10.xml><?xml version="1.0" encoding="utf-8"?>
-<p:sld xmlns:a="http://schemas.openxmlformats.org/drawingml/2006/main" xmlns:r="http://schemas.openxmlformats.org/officeDocument/2006/relationships" xmlns:p="http://schemas.openxmlformats.org/presentationml/2006/main">
+<p:sld xmlns:a="http://schemas.openxmlformats.org/drawingml/2006/main" xmlns:p="http://schemas.openxmlformats.org/presentationml/2006/main" xmlns:r="http://schemas.openxmlformats.org/officeDocument/2006/relationships">
   <p:cSld>
     <p:bg>
       <p:bgPr>
@@ -450,7 +453,7 @@
                   <a:srgbClr val="0F172A"/>
                 </a:solidFill>
               </a:rPr>
-              <a:t>Demo Flow 6: Meal Planning</a:t>
+              <a:t>Demo Flow 5: Meal Plan Listing and Creation</a:t>
             </a:r>
             <a:endParaRPr lang="en-US"/>
           </a:p>
@@ -485,7 +488,7 @@
                   <a:srgbClr val="475569"/>
                 </a:solidFill>
               </a:rPr>
-              <a:t>Main differentiator: recipes become plans</a:t>
+              <a:t>Create the planning list</a:t>
             </a:r>
             <a:endParaRPr lang="en-US"/>
           </a:p>
@@ -523,7 +526,7 @@
                   <a:srgbClr val="2563EB"/>
                 </a:solidFill>
               </a:rPr>
-              <a:t>14:00-17:00</a:t>
+              <a:t>13:30-15:30</a:t>
             </a:r>
             <a:endParaRPr lang="en-US"/>
           </a:p>
@@ -558,69 +561,74 @@
                   <a:srgbClr val="0F172A"/>
                 </a:solidFill>
               </a:rPr>
-              <a:t>Show:</a:t>
-            </a:r>
-            <a:endParaRPr lang="en-US"/>
-          </a:p>
-          <a:p>
-            <a:r>
-              <a:rPr lang="en-US" sz="1320">
-                <a:solidFill>
-                  <a:srgbClr val="334155"/>
-                </a:solidFill>
-              </a:rPr>
-              <a:t>- Open Meal Plans.</a:t>
-            </a:r>
-            <a:endParaRPr lang="en-US"/>
-          </a:p>
-          <a:p>
-            <a:r>
-              <a:rPr lang="en-US" sz="1320">
-                <a:solidFill>
-                  <a:srgbClr val="334155"/>
-                </a:solidFill>
-              </a:rPr>
-              <a:t>- Create or open a reusable Meal Plan.</a:t>
-            </a:r>
-            <a:endParaRPr lang="en-US"/>
-          </a:p>
-          <a:p>
-            <a:r>
-              <a:rPr lang="en-US" sz="1320">
-                <a:solidFill>
-                  <a:srgbClr val="334155"/>
-                </a:solidFill>
-              </a:rPr>
-              <a:t>- Add component recipe combinations: protein, vegetable, and side.</a:t>
-            </a:r>
-            <a:endParaRPr lang="en-US"/>
-          </a:p>
-          <a:p>
-            <a:r>
-              <a:rPr lang="en-US" sz="1320">
-                <a:solidFill>
-                  <a:srgbClr val="334155"/>
-                </a:solidFill>
-              </a:rPr>
-              <a:t>- Show cart-created recipe lists inside a plan.</a:t>
-            </a:r>
-            <a:endParaRPr lang="en-US"/>
-          </a:p>
-          <a:p>
-            <a:r>
-              <a:rPr lang="en-US" sz="1320">
-                <a:solidFill>
-                  <a:srgbClr val="334155"/>
-                </a:solidFill>
-              </a:rPr>
-              <a:t>- Adjust people, days, portions, and inspect ingredient totals.</a:t>
+              <a:t>Show:
+1. Open Meal Plans.
+2. Create a new plan with name, people, days, and meal type checkboxes.
+3. Explain the shift: this is planning what to eat, not a prep template.
+Talk about:
+- Plans start from a simple list, then expand into day-by-day meals.</a:t>
+            </a:r>
+            <a:endParaRPr lang="en-US"/>
+          </a:p>
+          <a:p>
+            <a:r>
+              <a:rPr lang="en-US" sz="1320">
+                <a:solidFill>
+                  <a:srgbClr val="334155"/>
+                </a:solidFill>
+              </a:rPr>
+              <a:t/>
+            </a:r>
+            <a:endParaRPr lang="en-US"/>
+          </a:p>
+          <a:p>
+            <a:r>
+              <a:rPr lang="en-US" sz="1320">
+                <a:solidFill>
+                  <a:srgbClr val="334155"/>
+                </a:solidFill>
+              </a:rPr>
+              <a:t/>
+            </a:r>
+            <a:endParaRPr lang="en-US"/>
+          </a:p>
+          <a:p>
+            <a:r>
+              <a:rPr lang="en-US" sz="1320">
+                <a:solidFill>
+                  <a:srgbClr val="334155"/>
+                </a:solidFill>
+              </a:rPr>
+              <a:t/>
+            </a:r>
+            <a:endParaRPr lang="en-US"/>
+          </a:p>
+          <a:p>
+            <a:r>
+              <a:rPr lang="en-US" sz="1320">
+                <a:solidFill>
+                  <a:srgbClr val="334155"/>
+                </a:solidFill>
+              </a:rPr>
+              <a:t/>
+            </a:r>
+            <a:endParaRPr lang="en-US"/>
+          </a:p>
+          <a:p>
+            <a:r>
+              <a:rPr lang="en-US" sz="1320">
+                <a:solidFill>
+                  <a:srgbClr val="334155"/>
+                </a:solidFill>
+              </a:rPr>
+              <a:t/>
             </a:r>
             <a:endParaRPr lang="en-US"/>
           </a:p>
           <a:p>
             <a:r>
               <a:rPr lang="en-US" sz="700"/>
-              <a:t> </a:t>
+              <a:t/>
             </a:r>
           </a:p>
           <a:p>
@@ -630,18 +638,53 @@
                   <a:srgbClr val="0F172A"/>
                 </a:solidFill>
               </a:rPr>
-              <a:t>Outcome to emphasize:</a:t>
-            </a:r>
-            <a:endParaRPr lang="en-US"/>
-          </a:p>
-          <a:p>
-            <a:r>
-              <a:rPr lang="en-US" sz="1320">
-                <a:solidFill>
-                  <a:srgbClr val="334155"/>
-                </a:solidFill>
-              </a:rPr>
-              <a:t>- Meal planning connects recipes to real household portions and grocery prep.</a:t>
+              <a:t/>
+            </a:r>
+            <a:endParaRPr lang="en-US"/>
+          </a:p>
+          <a:p>
+            <a:r>
+              <a:rPr lang="en-US" sz="1320">
+                <a:solidFill>
+                  <a:srgbClr val="334155"/>
+                </a:solidFill>
+              </a:rPr>
+              <a:t/>
+            </a:r>
+            <a:endParaRPr lang="en-US"/>
+          </a:p>
+        </p:txBody>
+      </p:sp>
+      <p:sp>
+        <p:nvSpPr>
+          <p:cNvPr id="20" name="Footer"/>
+          <p:cNvSpPr txBox="1"/>
+          <p:nvPr/>
+        </p:nvSpPr>
+        <p:spPr>
+          <a:xfrm>
+            <a:off x="530352" y="5833872"/>
+            <a:ext cx="4572000" cy="201168"/>
+          </a:xfrm>
+          <a:prstGeom prst="rect">
+            <a:avLst/>
+          </a:prstGeom>
+          <a:noFill/>
+          <a:ln>
+            <a:noFill/>
+          </a:ln>
+        </p:spPr>
+        <p:txBody>
+          <a:bodyPr wrap="square" lIns="91440" tIns="73152" rIns="91440" bIns="73152"/>
+          <a:lstStyle/>
+          <a:p>
+            <a:r>
+              <a:rPr lang="en-US" sz="850">
+                <a:solidFill>
+                  <a:srgbClr val="94A3B8"/>
+                </a:solidFill>
+              </a:rPr>
+              <a:t>Slide 10 of 12 | Rencipe Phase 1 demo plan</a:t>
             </a:r>
             <a:endParaRPr lang="en-US"/>
           </a:p>
@@ -649,7 +692,7 @@
       </p:sp>
       <p:pic>
         <p:nvPicPr>
-          <p:cNvPr id="9" name="ppt-meal-plans.png"/>
+          <p:cNvPr id="21" name="ppt-meal-plans-list.png"/>
           <p:cNvPicPr>
             <a:picLocks noChangeAspect="1"/>
           </p:cNvPicPr>
@@ -663,8 +706,8 @@
         </p:blipFill>
         <p:spPr>
           <a:xfrm>
-            <a:off x="7083566" y="1143000"/>
-            <a:ext cx="2154907" cy="4663440"/>
+            <a:off x="5972256" y="1207008"/>
+            <a:ext cx="2091527" cy="4526280"/>
           </a:xfrm>
           <a:prstGeom prst="rect">
             <a:avLst/>
@@ -676,41 +719,35 @@
           </a:ln>
         </p:spPr>
       </p:pic>
-      <p:sp>
-        <p:nvSpPr>
-          <p:cNvPr id="20" name="Footer"/>
-          <p:cNvSpPr txBox="1"/>
-          <p:nvPr/>
-        </p:nvSpPr>
-        <p:spPr>
-          <a:xfrm>
-            <a:off x="530352" y="5833872"/>
-            <a:ext cx="4572000" cy="201168"/>
-          </a:xfrm>
-          <a:prstGeom prst="rect">
-            <a:avLst/>
-          </a:prstGeom>
-          <a:noFill/>
-          <a:ln>
-            <a:noFill/>
-          </a:ln>
-        </p:spPr>
-        <p:txBody>
-          <a:bodyPr wrap="square" lIns="91440" tIns="73152" rIns="91440" bIns="73152"/>
-          <a:lstStyle/>
-          <a:p>
-            <a:r>
-              <a:rPr lang="en-US" sz="850">
-                <a:solidFill>
-                  <a:srgbClr val="94A3B8"/>
-                </a:solidFill>
-              </a:rPr>
-              <a:t>Slide 10 of 12 | Rencipe Phase 1 demo plan</a:t>
-            </a:r>
-            <a:endParaRPr lang="en-US"/>
-          </a:p>
-        </p:txBody>
-      </p:sp>
+      <p:pic>
+        <p:nvPicPr>
+          <p:cNvPr id="22" name="ppt-meal-plan-create.png"/>
+          <p:cNvPicPr>
+            <a:picLocks noChangeAspect="1"/>
+          </p:cNvPicPr>
+          <p:nvPr/>
+        </p:nvPicPr>
+        <p:blipFill>
+          <a:blip r:embed="rId3"/>
+          <a:stretch>
+            <a:fillRect/>
+          </a:stretch>
+        </p:blipFill>
+        <p:spPr>
+          <a:xfrm>
+            <a:off x="8303976" y="1207008"/>
+            <a:ext cx="2091527" cy="4526280"/>
+          </a:xfrm>
+          <a:prstGeom prst="rect">
+            <a:avLst/>
+          </a:prstGeom>
+          <a:ln w="9525">
+            <a:solidFill>
+              <a:srgbClr val="CBD5E1"/>
+            </a:solidFill>
+          </a:ln>
+        </p:spPr>
+      </p:pic>
     </p:spTree>
   </p:cSld>
   <p:clrMapOvr>
@@ -720,7 +757,7 @@
 </file>
 
 <file path=ppt/slides/slide11.xml><?xml version="1.0" encoding="utf-8"?>
-<p:sld xmlns:a="http://schemas.openxmlformats.org/drawingml/2006/main" xmlns:r="http://schemas.openxmlformats.org/officeDocument/2006/relationships" xmlns:p="http://schemas.openxmlformats.org/presentationml/2006/main">
+<p:sld xmlns:a="http://schemas.openxmlformats.org/drawingml/2006/main" xmlns:p="http://schemas.openxmlformats.org/presentationml/2006/main" xmlns:r="http://schemas.openxmlformats.org/officeDocument/2006/relationships">
   <p:cSld>
     <p:bg>
       <p:bgPr>
@@ -773,7 +810,7 @@
                   <a:srgbClr val="0F172A"/>
                 </a:solidFill>
               </a:rPr>
-              <a:t>Validation and Testing Evidence</a:t>
+              <a:t>Demo Flow 6: Meal Plan Editing</a:t>
             </a:r>
             <a:endParaRPr lang="en-US"/>
           </a:p>
@@ -808,7 +845,7 @@
                   <a:srgbClr val="475569"/>
                 </a:solidFill>
               </a:rPr>
-              <a:t>What has been verified</a:t>
+              <a:t>Day-by-day meal decisions</a:t>
             </a:r>
             <a:endParaRPr lang="en-US"/>
           </a:p>
@@ -846,7 +883,7 @@
                   <a:srgbClr val="2563EB"/>
                 </a:solidFill>
               </a:rPr>
-              <a:t>17:00-18:45</a:t>
+              <a:t>15:30-18:00</a:t>
             </a:r>
             <a:endParaRPr lang="en-US"/>
           </a:p>
@@ -881,58 +918,64 @@
                   <a:srgbClr val="0F172A"/>
                 </a:solidFill>
               </a:rPr>
-              <a:t>Build and deployment:</a:t>
-            </a:r>
-            <a:endParaRPr lang="en-US"/>
-          </a:p>
-          <a:p>
-            <a:r>
-              <a:rPr lang="en-US" sz="1320">
-                <a:solidFill>
-                  <a:srgbClr val="334155"/>
-                </a:solidFill>
-              </a:rPr>
-              <a:t>- Backend build passes.</a:t>
-            </a:r>
-            <a:endParaRPr lang="en-US"/>
-          </a:p>
-          <a:p>
-            <a:r>
-              <a:rPr lang="en-US" sz="1320">
-                <a:solidFill>
-                  <a:srgbClr val="334155"/>
-                </a:solidFill>
-              </a:rPr>
-              <a:t>- Frontend build passes.</a:t>
-            </a:r>
-            <a:endParaRPr lang="en-US"/>
-          </a:p>
-          <a:p>
-            <a:r>
-              <a:rPr lang="en-US" sz="1320">
-                <a:solidFill>
-                  <a:srgbClr val="334155"/>
-                </a:solidFill>
-              </a:rPr>
-              <a:t>- PM2 reloads only rencipe-backend and rencipe-frontend.</a:t>
-            </a:r>
-            <a:endParaRPr lang="en-US"/>
-          </a:p>
-          <a:p>
-            <a:r>
-              <a:rPr lang="en-US" sz="1320">
-                <a:solidFill>
-                  <a:srgbClr val="334155"/>
-                </a:solidFill>
-              </a:rPr>
-              <a:t>- Public URL returns HTTP/2 200; local ports 4000 and 6000 are listening.</a:t>
+              <a:t>Show:
+1. Day 1, Day 2, Day 3 sections.
+2. Add recipes from This Plan, Website, or Saved.
+3. Meal headers update as Breakfast (1), Dinner (2), etc.
+4. Recipes list by name in rows and can be removed with X.
+Verified:
+- Backend and frontend builds passed; public nginx checks passed.</a:t>
+            </a:r>
+            <a:endParaRPr lang="en-US"/>
+          </a:p>
+          <a:p>
+            <a:r>
+              <a:rPr lang="en-US" sz="1320">
+                <a:solidFill>
+                  <a:srgbClr val="334155"/>
+                </a:solidFill>
+              </a:rPr>
+              <a:t/>
+            </a:r>
+            <a:endParaRPr lang="en-US"/>
+          </a:p>
+          <a:p>
+            <a:r>
+              <a:rPr lang="en-US" sz="1320">
+                <a:solidFill>
+                  <a:srgbClr val="334155"/>
+                </a:solidFill>
+              </a:rPr>
+              <a:t/>
+            </a:r>
+            <a:endParaRPr lang="en-US"/>
+          </a:p>
+          <a:p>
+            <a:r>
+              <a:rPr lang="en-US" sz="1320">
+                <a:solidFill>
+                  <a:srgbClr val="334155"/>
+                </a:solidFill>
+              </a:rPr>
+              <a:t/>
+            </a:r>
+            <a:endParaRPr lang="en-US"/>
+          </a:p>
+          <a:p>
+            <a:r>
+              <a:rPr lang="en-US" sz="1320">
+                <a:solidFill>
+                  <a:srgbClr val="334155"/>
+                </a:solidFill>
+              </a:rPr>
+              <a:t/>
             </a:r>
             <a:endParaRPr lang="en-US"/>
           </a:p>
           <a:p>
             <a:r>
               <a:rPr lang="en-US" sz="700"/>
-              <a:t> </a:t>
+              <a:t/>
             </a:r>
           </a:p>
           <a:p>
@@ -942,62 +985,62 @@
                   <a:srgbClr val="0F172A"/>
                 </a:solidFill>
               </a:rPr>
-              <a:t>Playwright checks:</a:t>
-            </a:r>
-            <a:endParaRPr lang="en-US"/>
-          </a:p>
-          <a:p>
-            <a:r>
-              <a:rPr lang="en-US" sz="1320">
-                <a:solidFill>
-                  <a:srgbClr val="334155"/>
-                </a:solidFill>
-              </a:rPr>
-              <a:t>- Login page has no ad panel.</a:t>
-            </a:r>
-            <a:endParaRPr lang="en-US"/>
-          </a:p>
-          <a:p>
-            <a:r>
-              <a:rPr lang="en-US" sz="1320">
-                <a:solidFill>
-                  <a:srgbClr val="334155"/>
-                </a:solidFill>
-              </a:rPr>
-              <a:t>- Home has 10 public slides, no admin-private recommendations, Save and Add buttons.</a:t>
-            </a:r>
-            <a:endParaRPr lang="en-US"/>
-          </a:p>
-          <a:p>
-            <a:r>
-              <a:rPr lang="en-US" sz="1320">
-                <a:solidFill>
-                  <a:srgbClr val="334155"/>
-                </a:solidFill>
-              </a:rPr>
-              <a:t>- Bottom nav remains full-height on mobile viewport.</a:t>
-            </a:r>
-            <a:endParaRPr lang="en-US"/>
-          </a:p>
-          <a:p>
-            <a:r>
-              <a:rPr lang="en-US" sz="1320">
-                <a:solidFill>
-                  <a:srgbClr val="334155"/>
-                </a:solidFill>
-              </a:rPr>
-              <a:t>- Categories icons are centered.</a:t>
-            </a:r>
-            <a:endParaRPr lang="en-US"/>
-          </a:p>
-          <a:p>
-            <a:r>
-              <a:rPr lang="en-US" sz="1320">
-                <a:solidFill>
-                  <a:srgbClr val="334155"/>
-                </a:solidFill>
-              </a:rPr>
-              <a:t>- Saved page has simple saved-search copy and no warning-style delete treatment.</a:t>
+              <a:t/>
+            </a:r>
+            <a:endParaRPr lang="en-US"/>
+          </a:p>
+          <a:p>
+            <a:r>
+              <a:rPr lang="en-US" sz="1320">
+                <a:solidFill>
+                  <a:srgbClr val="334155"/>
+                </a:solidFill>
+              </a:rPr>
+              <a:t/>
+            </a:r>
+            <a:endParaRPr lang="en-US"/>
+          </a:p>
+          <a:p>
+            <a:r>
+              <a:rPr lang="en-US" sz="1320">
+                <a:solidFill>
+                  <a:srgbClr val="334155"/>
+                </a:solidFill>
+              </a:rPr>
+              <a:t/>
+            </a:r>
+            <a:endParaRPr lang="en-US"/>
+          </a:p>
+          <a:p>
+            <a:r>
+              <a:rPr lang="en-US" sz="1320">
+                <a:solidFill>
+                  <a:srgbClr val="334155"/>
+                </a:solidFill>
+              </a:rPr>
+              <a:t/>
+            </a:r>
+            <a:endParaRPr lang="en-US"/>
+          </a:p>
+          <a:p>
+            <a:r>
+              <a:rPr lang="en-US" sz="1320">
+                <a:solidFill>
+                  <a:srgbClr val="334155"/>
+                </a:solidFill>
+              </a:rPr>
+              <a:t/>
+            </a:r>
+            <a:endParaRPr lang="en-US"/>
+          </a:p>
+          <a:p>
+            <a:r>
+              <a:rPr lang="en-US" sz="1320">
+                <a:solidFill>
+                  <a:srgbClr val="334155"/>
+                </a:solidFill>
+              </a:rPr>
+              <a:t/>
             </a:r>
             <a:endParaRPr lang="en-US"/>
           </a:p>
@@ -1038,6 +1081,64 @@
           </a:p>
         </p:txBody>
       </p:sp>
+      <p:pic>
+        <p:nvPicPr>
+          <p:cNvPr id="21" name="ppt-meal-plan-detail.png"/>
+          <p:cNvPicPr>
+            <a:picLocks noChangeAspect="1"/>
+          </p:cNvPicPr>
+          <p:nvPr/>
+        </p:nvPicPr>
+        <p:blipFill>
+          <a:blip r:embed="rId2"/>
+          <a:stretch>
+            <a:fillRect/>
+          </a:stretch>
+        </p:blipFill>
+        <p:spPr>
+          <a:xfrm>
+            <a:off x="5972256" y="1207008"/>
+            <a:ext cx="2091527" cy="4526280"/>
+          </a:xfrm>
+          <a:prstGeom prst="rect">
+            <a:avLst/>
+          </a:prstGeom>
+          <a:ln w="9525">
+            <a:solidFill>
+              <a:srgbClr val="CBD5E1"/>
+            </a:solidFill>
+          </a:ln>
+        </p:spPr>
+      </p:pic>
+      <p:pic>
+        <p:nvPicPr>
+          <p:cNvPr id="22" name="ppt-meal-plan-add.png"/>
+          <p:cNvPicPr>
+            <a:picLocks noChangeAspect="1"/>
+          </p:cNvPicPr>
+          <p:nvPr/>
+        </p:nvPicPr>
+        <p:blipFill>
+          <a:blip r:embed="rId3"/>
+          <a:stretch>
+            <a:fillRect/>
+          </a:stretch>
+        </p:blipFill>
+        <p:spPr>
+          <a:xfrm>
+            <a:off x="8303976" y="1207008"/>
+            <a:ext cx="2091527" cy="4526280"/>
+          </a:xfrm>
+          <a:prstGeom prst="rect">
+            <a:avLst/>
+          </a:prstGeom>
+          <a:ln w="9525">
+            <a:solidFill>
+              <a:srgbClr val="CBD5E1"/>
+            </a:solidFill>
+          </a:ln>
+        </p:spPr>
+      </p:pic>
     </p:spTree>
   </p:cSld>
   <p:clrMapOvr>
@@ -1047,7 +1148,7 @@
 </file>
 
 <file path=ppt/slides/slide12.xml><?xml version="1.0" encoding="utf-8"?>
-<p:sld xmlns:a="http://schemas.openxmlformats.org/drawingml/2006/main" xmlns:r="http://schemas.openxmlformats.org/officeDocument/2006/relationships" xmlns:p="http://schemas.openxmlformats.org/presentationml/2006/main">
+<p:sld xmlns:a="http://schemas.openxmlformats.org/drawingml/2006/main" xmlns:p="http://schemas.openxmlformats.org/presentationml/2006/main">
   <p:cSld>
     <p:bg>
       <p:bgPr>
@@ -1208,36 +1309,40 @@
                   <a:srgbClr val="0F172A"/>
                 </a:solidFill>
               </a:rPr>
-              <a:t>Achieved:</a:t>
-            </a:r>
-            <a:endParaRPr lang="en-US"/>
-          </a:p>
-          <a:p>
-            <a:r>
-              <a:rPr lang="en-US" sz="1320">
-                <a:solidFill>
-                  <a:srgbClr val="334155"/>
-                </a:solidFill>
-              </a:rPr>
-              <a:t>- Recipe management, drafts, saved recipes, cart, search, categories, meal planning, auth, and deployment.</a:t>
-            </a:r>
-            <a:endParaRPr lang="en-US"/>
-          </a:p>
-          <a:p>
-            <a:r>
-              <a:rPr lang="en-US" sz="1320">
-                <a:solidFill>
-                  <a:srgbClr val="334155"/>
-                </a:solidFill>
-              </a:rPr>
-              <a:t>- Private recipe visibility can be demonstrated with admin versus testuser1.</a:t>
+              <a:t>Achieved:
+- Recipe management, search, recipe detail, settings/account identity, saved recipes, cart, day-based meal planning, auth, and deployment.
+- The demo now follows a clean recipe-basic path before meal planning.
+Remaining:
+- Rehearse timing, validate ingredient-list behavior with real demo plans, and decide whether keto scope is future work or a small visible feature.</a:t>
+            </a:r>
+            <a:endParaRPr lang="en-US"/>
+          </a:p>
+          <a:p>
+            <a:r>
+              <a:rPr lang="en-US" sz="1320">
+                <a:solidFill>
+                  <a:srgbClr val="334155"/>
+                </a:solidFill>
+              </a:rPr>
+              <a:t/>
+            </a:r>
+            <a:endParaRPr lang="en-US"/>
+          </a:p>
+          <a:p>
+            <a:r>
+              <a:rPr lang="en-US" sz="1320">
+                <a:solidFill>
+                  <a:srgbClr val="334155"/>
+                </a:solidFill>
+              </a:rPr>
+              <a:t/>
             </a:r>
             <a:endParaRPr lang="en-US"/>
           </a:p>
           <a:p>
             <a:r>
               <a:rPr lang="en-US" sz="700"/>
-              <a:t> </a:t>
+              <a:t/>
             </a:r>
           </a:p>
           <a:p>
@@ -1247,47 +1352,47 @@
                   <a:srgbClr val="0F172A"/>
                 </a:solidFill>
               </a:rPr>
-              <a:t>Still needs rehearsal or scope decision:</a:t>
-            </a:r>
-            <a:endParaRPr lang="en-US"/>
-          </a:p>
-          <a:p>
-            <a:r>
-              <a:rPr lang="en-US" sz="1320">
-                <a:solidFill>
-                  <a:srgbClr val="334155"/>
-                </a:solidFill>
-              </a:rPr>
-              <a:t>- Verify scaled meal-plan ingredient totals during the final walkthrough.</a:t>
-            </a:r>
-            <a:endParaRPr lang="en-US"/>
-          </a:p>
-          <a:p>
-            <a:r>
-              <a:rPr lang="en-US" sz="1320">
-                <a:solidFill>
-                  <a:srgbClr val="334155"/>
-                </a:solidFill>
-              </a:rPr>
-              <a:t>- Decide how to present keto-specific features: small visible feature or future work.</a:t>
-            </a:r>
-            <a:endParaRPr lang="en-US"/>
-          </a:p>
-          <a:p>
-            <a:r>
-              <a:rPr lang="en-US" sz="1320">
-                <a:solidFill>
-                  <a:srgbClr val="334155"/>
-                </a:solidFill>
-              </a:rPr>
-              <a:t>- Finish report sections and record the final presentation video.</a:t>
+              <a:t/>
+            </a:r>
+            <a:endParaRPr lang="en-US"/>
+          </a:p>
+          <a:p>
+            <a:r>
+              <a:rPr lang="en-US" sz="1320">
+                <a:solidFill>
+                  <a:srgbClr val="334155"/>
+                </a:solidFill>
+              </a:rPr>
+              <a:t/>
+            </a:r>
+            <a:endParaRPr lang="en-US"/>
+          </a:p>
+          <a:p>
+            <a:r>
+              <a:rPr lang="en-US" sz="1320">
+                <a:solidFill>
+                  <a:srgbClr val="334155"/>
+                </a:solidFill>
+              </a:rPr>
+              <a:t/>
+            </a:r>
+            <a:endParaRPr lang="en-US"/>
+          </a:p>
+          <a:p>
+            <a:r>
+              <a:rPr lang="en-US" sz="1320">
+                <a:solidFill>
+                  <a:srgbClr val="334155"/>
+                </a:solidFill>
+              </a:rPr>
+              <a:t/>
             </a:r>
             <a:endParaRPr lang="en-US"/>
           </a:p>
           <a:p>
             <a:r>
               <a:rPr lang="en-US" sz="700"/>
-              <a:t> </a:t>
+              <a:t/>
             </a:r>
           </a:p>
           <a:p>
@@ -1297,18 +1402,18 @@
                   <a:srgbClr val="0F172A"/>
                 </a:solidFill>
               </a:rPr>
-              <a:t>Closing success criteria:</a:t>
-            </a:r>
-            <a:endParaRPr lang="en-US"/>
-          </a:p>
-          <a:p>
-            <a:r>
-              <a:rPr lang="en-US" sz="1320">
-                <a:solidFill>
-                  <a:srgbClr val="334155"/>
-                </a:solidFill>
-              </a:rPr>
-              <a:t>- A viewer can understand the problem, see the solution working, and tell which Phase 1 goals were achieved.</a:t>
+              <a:t/>
+            </a:r>
+            <a:endParaRPr lang="en-US"/>
+          </a:p>
+          <a:p>
+            <a:r>
+              <a:rPr lang="en-US" sz="1320">
+                <a:solidFill>
+                  <a:srgbClr val="334155"/>
+                </a:solidFill>
+              </a:rPr>
+              <a:t/>
             </a:r>
             <a:endParaRPr lang="en-US"/>
           </a:p>
@@ -1358,7 +1463,7 @@
 </file>
 
 <file path=ppt/slides/slide2.xml><?xml version="1.0" encoding="utf-8"?>
-<p:sld xmlns:a="http://schemas.openxmlformats.org/drawingml/2006/main" xmlns:r="http://schemas.openxmlformats.org/officeDocument/2006/relationships" xmlns:p="http://schemas.openxmlformats.org/presentationml/2006/main">
+<p:sld xmlns:a="http://schemas.openxmlformats.org/drawingml/2006/main" xmlns:p="http://schemas.openxmlformats.org/presentationml/2006/main">
   <p:cSld>
     <p:bg>
       <p:bgPr>
@@ -1519,36 +1624,45 @@
                   <a:srgbClr val="0F172A"/>
                 </a:solidFill>
               </a:rPr>
-              <a:t>Background:</a:t>
-            </a:r>
-            <a:endParaRPr lang="en-US"/>
-          </a:p>
-          <a:p>
-            <a:r>
-              <a:rPr lang="en-US" sz="1320">
-                <a:solidFill>
-                  <a:srgbClr val="334155"/>
-                </a:solidFill>
-              </a:rPr>
-              <a:t>- Recipes are scattered across sites, videos, notes, and family habits.</a:t>
-            </a:r>
-            <a:endParaRPr lang="en-US"/>
-          </a:p>
-          <a:p>
-            <a:r>
-              <a:rPr lang="en-US" sz="1320">
-                <a:solidFill>
-                  <a:srgbClr val="334155"/>
-                </a:solidFill>
-              </a:rPr>
-              <a:t>- Most tools help users browse recipes, but do not connect them to meal preparation.</a:t>
+              <a:t>Background:
+- Recipes are scattered across sites, videos, notes, and family habits.
+- Most tools help users browse recipes, but do not connect them to the question: what should we eat this week?
+Problem:
+- Weekly planning, grocery prep, and schedule decisions are still mostly manual.
+- Households need one flow from recipe to saved list, cart, meal plan, and schedule.
+Significance:
+- Reduce planning chaos.
+- Save grocery-shopping time.
+- Support healthier repeatable meals.</a:t>
+            </a:r>
+            <a:endParaRPr lang="en-US"/>
+          </a:p>
+          <a:p>
+            <a:r>
+              <a:rPr lang="en-US" sz="1320">
+                <a:solidFill>
+                  <a:srgbClr val="334155"/>
+                </a:solidFill>
+              </a:rPr>
+              <a:t/>
+            </a:r>
+            <a:endParaRPr lang="en-US"/>
+          </a:p>
+          <a:p>
+            <a:r>
+              <a:rPr lang="en-US" sz="1320">
+                <a:solidFill>
+                  <a:srgbClr val="334155"/>
+                </a:solidFill>
+              </a:rPr>
+              <a:t/>
             </a:r>
             <a:endParaRPr lang="en-US"/>
           </a:p>
           <a:p>
             <a:r>
               <a:rPr lang="en-US" sz="700"/>
-              <a:t> </a:t>
+              <a:t/>
             </a:r>
           </a:p>
           <a:p>
@@ -1558,36 +1672,36 @@
                   <a:srgbClr val="0F172A"/>
                 </a:solidFill>
               </a:rPr>
-              <a:t>Problem:</a:t>
-            </a:r>
-            <a:endParaRPr lang="en-US"/>
-          </a:p>
-          <a:p>
-            <a:r>
-              <a:rPr lang="en-US" sz="1320">
-                <a:solidFill>
-                  <a:srgbClr val="334155"/>
-                </a:solidFill>
-              </a:rPr>
-              <a:t>- Meal planning, grocery prep, and portion adjustment are still mostly manual.</a:t>
-            </a:r>
-            <a:endParaRPr lang="en-US"/>
-          </a:p>
-          <a:p>
-            <a:r>
-              <a:rPr lang="en-US" sz="1320">
-                <a:solidFill>
-                  <a:srgbClr val="334155"/>
-                </a:solidFill>
-              </a:rPr>
-              <a:t>- Households need one flow from recipe to saved list, cart, meal plan, and schedule.</a:t>
+              <a:t/>
+            </a:r>
+            <a:endParaRPr lang="en-US"/>
+          </a:p>
+          <a:p>
+            <a:r>
+              <a:rPr lang="en-US" sz="1320">
+                <a:solidFill>
+                  <a:srgbClr val="334155"/>
+                </a:solidFill>
+              </a:rPr>
+              <a:t/>
+            </a:r>
+            <a:endParaRPr lang="en-US"/>
+          </a:p>
+          <a:p>
+            <a:r>
+              <a:rPr lang="en-US" sz="1320">
+                <a:solidFill>
+                  <a:srgbClr val="334155"/>
+                </a:solidFill>
+              </a:rPr>
+              <a:t/>
             </a:r>
             <a:endParaRPr lang="en-US"/>
           </a:p>
           <a:p>
             <a:r>
               <a:rPr lang="en-US" sz="700"/>
-              <a:t> </a:t>
+              <a:t/>
             </a:r>
           </a:p>
           <a:p>
@@ -1597,40 +1711,40 @@
                   <a:srgbClr val="0F172A"/>
                 </a:solidFill>
               </a:rPr>
-              <a:t>Significance:</a:t>
-            </a:r>
-            <a:endParaRPr lang="en-US"/>
-          </a:p>
-          <a:p>
-            <a:r>
-              <a:rPr lang="en-US" sz="1320">
-                <a:solidFill>
-                  <a:srgbClr val="334155"/>
-                </a:solidFill>
-              </a:rPr>
-              <a:t>- Reduce planning chaos.</a:t>
-            </a:r>
-            <a:endParaRPr lang="en-US"/>
-          </a:p>
-          <a:p>
-            <a:r>
-              <a:rPr lang="en-US" sz="1320">
-                <a:solidFill>
-                  <a:srgbClr val="334155"/>
-                </a:solidFill>
-              </a:rPr>
-              <a:t>- Save grocery-shopping time.</a:t>
-            </a:r>
-            <a:endParaRPr lang="en-US"/>
-          </a:p>
-          <a:p>
-            <a:r>
-              <a:rPr lang="en-US" sz="1320">
-                <a:solidFill>
-                  <a:srgbClr val="334155"/>
-                </a:solidFill>
-              </a:rPr>
-              <a:t>- Support healthier repeatable meals.</a:t>
+              <a:t/>
+            </a:r>
+            <a:endParaRPr lang="en-US"/>
+          </a:p>
+          <a:p>
+            <a:r>
+              <a:rPr lang="en-US" sz="1320">
+                <a:solidFill>
+                  <a:srgbClr val="334155"/>
+                </a:solidFill>
+              </a:rPr>
+              <a:t/>
+            </a:r>
+            <a:endParaRPr lang="en-US"/>
+          </a:p>
+          <a:p>
+            <a:r>
+              <a:rPr lang="en-US" sz="1320">
+                <a:solidFill>
+                  <a:srgbClr val="334155"/>
+                </a:solidFill>
+              </a:rPr>
+              <a:t/>
+            </a:r>
+            <a:endParaRPr lang="en-US"/>
+          </a:p>
+          <a:p>
+            <a:r>
+              <a:rPr lang="en-US" sz="1320">
+                <a:solidFill>
+                  <a:srgbClr val="334155"/>
+                </a:solidFill>
+              </a:rPr>
+              <a:t/>
             </a:r>
             <a:endParaRPr lang="en-US"/>
           </a:p>
@@ -1680,7 +1794,7 @@
 </file>
 
 <file path=ppt/slides/slide3.xml><?xml version="1.0" encoding="utf-8"?>
-<p:sld xmlns:a="http://schemas.openxmlformats.org/drawingml/2006/main" xmlns:r="http://schemas.openxmlformats.org/officeDocument/2006/relationships" xmlns:p="http://schemas.openxmlformats.org/presentationml/2006/main">
+<p:sld xmlns:a="http://schemas.openxmlformats.org/drawingml/2006/main" xmlns:p="http://schemas.openxmlformats.org/presentationml/2006/main">
   <p:cSld>
     <p:bg>
       <p:bgPr>
@@ -1841,95 +1955,100 @@
                   <a:srgbClr val="0F172A"/>
                 </a:solidFill>
               </a:rPr>
-              <a:t>Ready features:</a:t>
-            </a:r>
-            <a:endParaRPr lang="en-US"/>
-          </a:p>
-          <a:p>
-            <a:r>
-              <a:rPr lang="en-US" sz="1320">
-                <a:solidFill>
-                  <a:srgbClr val="334155"/>
-                </a:solidFill>
-              </a:rPr>
-              <a:t>- Backend login with demo users: admin/admin and testuser1/testuser1.</a:t>
-            </a:r>
-            <a:endParaRPr lang="en-US"/>
-          </a:p>
-          <a:p>
-            <a:r>
-              <a:rPr lang="en-US" sz="1320">
-                <a:solidFill>
-                  <a:srgbClr val="334155"/>
-                </a:solidFill>
-              </a:rPr>
-              <a:t>- Recipe visibility: public recipes for users, admin-private recipes only for admin.</a:t>
-            </a:r>
-            <a:endParaRPr lang="en-US"/>
-          </a:p>
-          <a:p>
-            <a:r>
-              <a:rPr lang="en-US" sz="1320">
-                <a:solidFill>
-                  <a:srgbClr val="334155"/>
-                </a:solidFill>
-              </a:rPr>
-              <a:t>- Home discovery with 10 public slideshow recipes and Save/Add actions.</a:t>
-            </a:r>
-            <a:endParaRPr lang="en-US"/>
-          </a:p>
-          <a:p>
-            <a:r>
-              <a:rPr lang="en-US" sz="1320">
-                <a:solidFill>
-                  <a:srgbClr val="334155"/>
-                </a:solidFill>
-              </a:rPr>
-              <a:t>- Separate Search and Categories pages.</a:t>
-            </a:r>
-            <a:endParaRPr lang="en-US"/>
-          </a:p>
-          <a:p>
-            <a:r>
-              <a:rPr lang="en-US" sz="1320">
-                <a:solidFill>
-                  <a:srgbClr val="334155"/>
-                </a:solidFill>
-              </a:rPr>
-              <a:t>- Saved recipes, cart, and checkout into Meal Plans.</a:t>
-            </a:r>
-            <a:endParaRPr lang="en-US"/>
-          </a:p>
-          <a:p>
-            <a:r>
-              <a:rPr lang="en-US" sz="1320">
-                <a:solidFill>
-                  <a:srgbClr val="334155"/>
-                </a:solidFill>
-              </a:rPr>
-              <a:t>- Recipe create/edit/delete, cover images, step images, and autosaved drafts.</a:t>
-            </a:r>
-            <a:endParaRPr lang="en-US"/>
-          </a:p>
-          <a:p>
-            <a:r>
-              <a:rPr lang="en-US" sz="1320">
-                <a:solidFill>
-                  <a:srgbClr val="334155"/>
-                </a:solidFill>
-              </a:rPr>
-              <a:t>- Meal Plans with people, portions, combinations, cart recipes, and ingredient lists.</a:t>
-            </a:r>
-            <a:endParaRPr lang="en-US"/>
-          </a:p>
-          <a:p>
-            <a:r>
-              <a:rPr lang="en-US" sz="1320">
-                <a:solidFill>
-                  <a:srgbClr val="334155"/>
-                </a:solidFill>
-              </a:rPr>
-              <a:t>- Live deployment with SSL/TLS, Nginx, PM2, frontend 4000, backend 6000.</a:t>
+              <a:t>Ready features:
+- Backend login with demo users: admin/admin and testuser1/testuser1.
+- Recipe visibility: public recipes for users, admin-private recipes for admin.
+- Recipe browse, search, detail, create, edit, drafts, saved recipes, and cart.
+- Meal Plans now plan what to eat by day and meal, with multiple recipes per meal.
+- Public deployment runs through Nginx, SSL/TLS, PM2, frontend 4000, backend 6000.</a:t>
+            </a:r>
+            <a:endParaRPr lang="en-US"/>
+          </a:p>
+          <a:p>
+            <a:r>
+              <a:rPr lang="en-US" sz="1320">
+                <a:solidFill>
+                  <a:srgbClr val="334155"/>
+                </a:solidFill>
+              </a:rPr>
+              <a:t/>
+            </a:r>
+            <a:endParaRPr lang="en-US"/>
+          </a:p>
+          <a:p>
+            <a:r>
+              <a:rPr lang="en-US" sz="1320">
+                <a:solidFill>
+                  <a:srgbClr val="334155"/>
+                </a:solidFill>
+              </a:rPr>
+              <a:t/>
+            </a:r>
+            <a:endParaRPr lang="en-US"/>
+          </a:p>
+          <a:p>
+            <a:r>
+              <a:rPr lang="en-US" sz="1320">
+                <a:solidFill>
+                  <a:srgbClr val="334155"/>
+                </a:solidFill>
+              </a:rPr>
+              <a:t/>
+            </a:r>
+            <a:endParaRPr lang="en-US"/>
+          </a:p>
+          <a:p>
+            <a:r>
+              <a:rPr lang="en-US" sz="1320">
+                <a:solidFill>
+                  <a:srgbClr val="334155"/>
+                </a:solidFill>
+              </a:rPr>
+              <a:t/>
+            </a:r>
+            <a:endParaRPr lang="en-US"/>
+          </a:p>
+          <a:p>
+            <a:r>
+              <a:rPr lang="en-US" sz="1320">
+                <a:solidFill>
+                  <a:srgbClr val="334155"/>
+                </a:solidFill>
+              </a:rPr>
+              <a:t/>
+            </a:r>
+            <a:endParaRPr lang="en-US"/>
+          </a:p>
+          <a:p>
+            <a:r>
+              <a:rPr lang="en-US" sz="1320">
+                <a:solidFill>
+                  <a:srgbClr val="334155"/>
+                </a:solidFill>
+              </a:rPr>
+              <a:t/>
+            </a:r>
+            <a:endParaRPr lang="en-US"/>
+          </a:p>
+          <a:p>
+            <a:r>
+              <a:rPr lang="en-US" sz="1320">
+                <a:solidFill>
+                  <a:srgbClr val="334155"/>
+                </a:solidFill>
+              </a:rPr>
+              <a:t/>
+            </a:r>
+            <a:endParaRPr lang="en-US"/>
+          </a:p>
+          <a:p>
+            <a:r>
+              <a:rPr lang="en-US" sz="1320">
+                <a:solidFill>
+                  <a:srgbClr val="334155"/>
+                </a:solidFill>
+              </a:rPr>
+              <a:t/>
             </a:r>
             <a:endParaRPr lang="en-US"/>
           </a:p>
@@ -2173,7 +2292,7 @@
                   <a:srgbClr val="334155"/>
                 </a:solidFill>
               </a:rPr>
-              <a:t>- Backend persists recipes, users, carts, favorites, drafts, and plans in MongoDB.</a:t>
+              <a:t>- Backend persists recipes, users, saved recipes, drafts, and plans in MongoDB.</a:t>
             </a:r>
             <a:endParaRPr lang="en-US"/>
           </a:p>
@@ -2618,7 +2737,7 @@
 </file>
 
 <file path=ppt/slides/slide6.xml><?xml version="1.0" encoding="utf-8"?>
-<p:sld xmlns:a="http://schemas.openxmlformats.org/drawingml/2006/main" xmlns:r="http://schemas.openxmlformats.org/officeDocument/2006/relationships" xmlns:p="http://schemas.openxmlformats.org/presentationml/2006/main">
+<p:sld xmlns:a="http://schemas.openxmlformats.org/drawingml/2006/main" xmlns:p="http://schemas.openxmlformats.org/presentationml/2006/main" xmlns:r="http://schemas.openxmlformats.org/officeDocument/2006/relationships">
   <p:cSld>
     <p:bg>
       <p:bgPr>
@@ -2671,7 +2790,7 @@
                   <a:srgbClr val="0F172A"/>
                 </a:solidFill>
               </a:rPr>
-              <a:t>Demo Flow 2: Home Discovery</a:t>
+              <a:t>Demo Flow 2: Homepage</a:t>
             </a:r>
             <a:endParaRPr lang="en-US"/>
           </a:p>
@@ -2706,7 +2825,7 @@
                   <a:srgbClr val="475569"/>
                 </a:solidFill>
               </a:rPr>
-              <a:t>Public recommendations and quick actions</a:t>
+              <a:t>Start the recipe basics walkthrough</a:t>
             </a:r>
             <a:endParaRPr lang="en-US"/>
           </a:p>
@@ -2779,58 +2898,63 @@
                   <a:srgbClr val="0F172A"/>
                 </a:solidFill>
               </a:rPr>
-              <a:t>Show:</a:t>
-            </a:r>
-            <a:endParaRPr lang="en-US"/>
-          </a:p>
-          <a:p>
-            <a:r>
-              <a:rPr lang="en-US" sz="1320">
-                <a:solidFill>
-                  <a:srgbClr val="334155"/>
-                </a:solidFill>
-              </a:rPr>
-              <a:t>- Home slideshow with 10 public recipe images.</a:t>
-            </a:r>
-            <a:endParaRPr lang="en-US"/>
-          </a:p>
-          <a:p>
-            <a:r>
-              <a:rPr lang="en-US" sz="1320">
-                <a:solidFill>
-                  <a:srgbClr val="334155"/>
-                </a:solidFill>
-              </a:rPr>
-              <a:t>- Wider transparent arrow controls with black borders.</a:t>
-            </a:r>
-            <a:endParaRPr lang="en-US"/>
-          </a:p>
-          <a:p>
-            <a:r>
-              <a:rPr lang="en-US" sz="1320">
-                <a:solidFill>
-                  <a:srgbClr val="334155"/>
-                </a:solidFill>
-              </a:rPr>
-              <a:t>- Recipe cards include both Save and Add actions.</a:t>
-            </a:r>
-            <a:endParaRPr lang="en-US"/>
-          </a:p>
-          <a:p>
-            <a:r>
-              <a:rPr lang="en-US" sz="1320">
-                <a:solidFill>
-                  <a:srgbClr val="334155"/>
-                </a:solidFill>
-              </a:rPr>
-              <a:t>- Admin-private recipes do not appear in recommendations.</a:t>
+              <a:t>Show:
+1. Open the homepage.
+2. Point out recipe cards, real food images, uploader avatar/name, save, and cart actions.
+3. Use this as the first screen in the recipe-basic story.
+Talk about:
+- The app is phone-first, visual, and built for quick recipe discovery.</a:t>
+            </a:r>
+            <a:endParaRPr lang="en-US"/>
+          </a:p>
+          <a:p>
+            <a:r>
+              <a:rPr lang="en-US" sz="1320">
+                <a:solidFill>
+                  <a:srgbClr val="334155"/>
+                </a:solidFill>
+              </a:rPr>
+              <a:t/>
+            </a:r>
+            <a:endParaRPr lang="en-US"/>
+          </a:p>
+          <a:p>
+            <a:r>
+              <a:rPr lang="en-US" sz="1320">
+                <a:solidFill>
+                  <a:srgbClr val="334155"/>
+                </a:solidFill>
+              </a:rPr>
+              <a:t/>
+            </a:r>
+            <a:endParaRPr lang="en-US"/>
+          </a:p>
+          <a:p>
+            <a:r>
+              <a:rPr lang="en-US" sz="1320">
+                <a:solidFill>
+                  <a:srgbClr val="334155"/>
+                </a:solidFill>
+              </a:rPr>
+              <a:t/>
+            </a:r>
+            <a:endParaRPr lang="en-US"/>
+          </a:p>
+          <a:p>
+            <a:r>
+              <a:rPr lang="en-US" sz="1320">
+                <a:solidFill>
+                  <a:srgbClr val="334155"/>
+                </a:solidFill>
+              </a:rPr>
+              <a:t/>
             </a:r>
             <a:endParaRPr lang="en-US"/>
           </a:p>
           <a:p>
             <a:r>
               <a:rPr lang="en-US" sz="700"/>
-              <a:t> </a:t>
+              <a:t/>
             </a:r>
           </a:p>
           <a:p>
@@ -2840,29 +2964,64 @@
                   <a:srgbClr val="0F172A"/>
                 </a:solidFill>
               </a:rPr>
-              <a:t>Outcome to emphasize:</a:t>
-            </a:r>
-            <a:endParaRPr lang="en-US"/>
-          </a:p>
-          <a:p>
-            <a:r>
-              <a:rPr lang="en-US" sz="1320">
-                <a:solidFill>
-                  <a:srgbClr val="334155"/>
-                </a:solidFill>
-              </a:rPr>
-              <a:t>- The app feels like a usable recipe product, not only a database UI.</a:t>
-            </a:r>
-            <a:endParaRPr lang="en-US"/>
-          </a:p>
-          <a:p>
-            <a:r>
-              <a:rPr lang="en-US" sz="1320">
-                <a:solidFill>
-                  <a:srgbClr val="334155"/>
-                </a:solidFill>
-              </a:rPr>
-              <a:t>- Discovery leads directly into saved recipes and shopping/cart workflows.</a:t>
+              <a:t/>
+            </a:r>
+            <a:endParaRPr lang="en-US"/>
+          </a:p>
+          <a:p>
+            <a:r>
+              <a:rPr lang="en-US" sz="1320">
+                <a:solidFill>
+                  <a:srgbClr val="334155"/>
+                </a:solidFill>
+              </a:rPr>
+              <a:t/>
+            </a:r>
+            <a:endParaRPr lang="en-US"/>
+          </a:p>
+          <a:p>
+            <a:r>
+              <a:rPr lang="en-US" sz="1320">
+                <a:solidFill>
+                  <a:srgbClr val="334155"/>
+                </a:solidFill>
+              </a:rPr>
+              <a:t/>
+            </a:r>
+            <a:endParaRPr lang="en-US"/>
+          </a:p>
+        </p:txBody>
+      </p:sp>
+      <p:sp>
+        <p:nvSpPr>
+          <p:cNvPr id="20" name="Footer"/>
+          <p:cNvSpPr txBox="1"/>
+          <p:nvPr/>
+        </p:nvSpPr>
+        <p:spPr>
+          <a:xfrm>
+            <a:off x="530352" y="5833872"/>
+            <a:ext cx="4572000" cy="201168"/>
+          </a:xfrm>
+          <a:prstGeom prst="rect">
+            <a:avLst/>
+          </a:prstGeom>
+          <a:noFill/>
+          <a:ln>
+            <a:noFill/>
+          </a:ln>
+        </p:spPr>
+        <p:txBody>
+          <a:bodyPr wrap="square" lIns="91440" tIns="73152" rIns="91440" bIns="73152"/>
+          <a:lstStyle/>
+          <a:p>
+            <a:r>
+              <a:rPr lang="en-US" sz="850">
+                <a:solidFill>
+                  <a:srgbClr val="94A3B8"/>
+                </a:solidFill>
+              </a:rPr>
+              <a:t>Slide 6 of 12 | Rencipe Phase 1 demo plan</a:t>
             </a:r>
             <a:endParaRPr lang="en-US"/>
           </a:p>
@@ -2870,7 +3029,7 @@
       </p:sp>
       <p:pic>
         <p:nvPicPr>
-          <p:cNvPr id="9" name="ppt-home.png"/>
+          <p:cNvPr id="21" name="ppt-home.png"/>
           <p:cNvPicPr>
             <a:picLocks noChangeAspect="1"/>
           </p:cNvPicPr>
@@ -2897,41 +3056,6 @@
           </a:ln>
         </p:spPr>
       </p:pic>
-      <p:sp>
-        <p:nvSpPr>
-          <p:cNvPr id="20" name="Footer"/>
-          <p:cNvSpPr txBox="1"/>
-          <p:nvPr/>
-        </p:nvSpPr>
-        <p:spPr>
-          <a:xfrm>
-            <a:off x="530352" y="5833872"/>
-            <a:ext cx="4572000" cy="201168"/>
-          </a:xfrm>
-          <a:prstGeom prst="rect">
-            <a:avLst/>
-          </a:prstGeom>
-          <a:noFill/>
-          <a:ln>
-            <a:noFill/>
-          </a:ln>
-        </p:spPr>
-        <p:txBody>
-          <a:bodyPr wrap="square" lIns="91440" tIns="73152" rIns="91440" bIns="73152"/>
-          <a:lstStyle/>
-          <a:p>
-            <a:r>
-              <a:rPr lang="en-US" sz="850">
-                <a:solidFill>
-                  <a:srgbClr val="94A3B8"/>
-                </a:solidFill>
-              </a:rPr>
-              <a:t>Slide 6 of 12 | Rencipe Phase 1 demo plan</a:t>
-            </a:r>
-            <a:endParaRPr lang="en-US"/>
-          </a:p>
-        </p:txBody>
-      </p:sp>
     </p:spTree>
   </p:cSld>
   <p:clrMapOvr>
@@ -2941,7 +3065,7 @@
 </file>
 
 <file path=ppt/slides/slide7.xml><?xml version="1.0" encoding="utf-8"?>
-<p:sld xmlns:a="http://schemas.openxmlformats.org/drawingml/2006/main" xmlns:r="http://schemas.openxmlformats.org/officeDocument/2006/relationships" xmlns:p="http://schemas.openxmlformats.org/presentationml/2006/main">
+<p:sld xmlns:a="http://schemas.openxmlformats.org/drawingml/2006/main" xmlns:p="http://schemas.openxmlformats.org/presentationml/2006/main" xmlns:r="http://schemas.openxmlformats.org/officeDocument/2006/relationships">
   <p:cSld>
     <p:bg>
       <p:bgPr>
@@ -2994,7 +3118,7 @@
                   <a:srgbClr val="0F172A"/>
                 </a:solidFill>
               </a:rPr>
-              <a:t>Demo Flow 3: Search and Categories</a:t>
+              <a:t>Demo Flow 3: Search Page and Searched View</a:t>
             </a:r>
             <a:endParaRPr lang="en-US"/>
           </a:p>
@@ -3029,7 +3153,7 @@
                   <a:srgbClr val="475569"/>
                 </a:solidFill>
               </a:rPr>
-              <a:t>Separate live search from category browsing</a:t>
+              <a:t>Search before opening a recipe</a:t>
             </a:r>
             <a:endParaRPr lang="en-US"/>
           </a:p>
@@ -3102,47 +3226,52 @@
                   <a:srgbClr val="0F172A"/>
                 </a:solidFill>
               </a:rPr>
-              <a:t>Show:</a:t>
-            </a:r>
-            <a:endParaRPr lang="en-US"/>
-          </a:p>
-          <a:p>
-            <a:r>
-              <a:rPr lang="en-US" sz="1320">
-                <a:solidFill>
-                  <a:srgbClr val="334155"/>
-                </a:solidFill>
-              </a:rPr>
-              <a:t>- Use Search for live query results, history, and recommendations.</a:t>
-            </a:r>
-            <a:endParaRPr lang="en-US"/>
-          </a:p>
-          <a:p>
-            <a:r>
-              <a:rPr lang="en-US" sz="1320">
-                <a:solidFill>
-                  <a:srgbClr val="334155"/>
-                </a:solidFill>
-              </a:rPr>
-              <a:t>- Use Categories for browse shortcuts and filter chips.</a:t>
-            </a:r>
-            <a:endParaRPr lang="en-US"/>
-          </a:p>
-          <a:p>
-            <a:r>
-              <a:rPr lang="en-US" sz="1320">
-                <a:solidFill>
-                  <a:srgbClr val="334155"/>
-                </a:solidFill>
-              </a:rPr>
-              <a:t>- Open a recipe from either surface.</a:t>
+              <a:t>Show:
+1. Open the Search page.
+2. Type miso and show the searched view.
+3. Point out the matching recipe card, uploader avatar, and cart/save state.
+Talk about:
+- Search supports live filtering, history, recommendations, and pinyin-friendly matching.</a:t>
+            </a:r>
+            <a:endParaRPr lang="en-US"/>
+          </a:p>
+          <a:p>
+            <a:r>
+              <a:rPr lang="en-US" sz="1320">
+                <a:solidFill>
+                  <a:srgbClr val="334155"/>
+                </a:solidFill>
+              </a:rPr>
+              <a:t/>
+            </a:r>
+            <a:endParaRPr lang="en-US"/>
+          </a:p>
+          <a:p>
+            <a:r>
+              <a:rPr lang="en-US" sz="1320">
+                <a:solidFill>
+                  <a:srgbClr val="334155"/>
+                </a:solidFill>
+              </a:rPr>
+              <a:t/>
+            </a:r>
+            <a:endParaRPr lang="en-US"/>
+          </a:p>
+          <a:p>
+            <a:r>
+              <a:rPr lang="en-US" sz="1320">
+                <a:solidFill>
+                  <a:srgbClr val="334155"/>
+                </a:solidFill>
+              </a:rPr>
+              <a:t/>
             </a:r>
             <a:endParaRPr lang="en-US"/>
           </a:p>
           <a:p>
             <a:r>
               <a:rPr lang="en-US" sz="700"/>
-              <a:t> </a:t>
+              <a:t/>
             </a:r>
           </a:p>
           <a:p>
@@ -3152,29 +3281,64 @@
                   <a:srgbClr val="0F172A"/>
                 </a:solidFill>
               </a:rPr>
-              <a:t>Outcome to emphasize:</a:t>
-            </a:r>
-            <a:endParaRPr lang="en-US"/>
-          </a:p>
-          <a:p>
-            <a:r>
-              <a:rPr lang="en-US" sz="1320">
-                <a:solidFill>
-                  <a:srgbClr val="334155"/>
-                </a:solidFill>
-              </a:rPr>
-              <a:t>- Search and category browsing are intentionally separate flows.</a:t>
-            </a:r>
-            <a:endParaRPr lang="en-US"/>
-          </a:p>
-          <a:p>
-            <a:r>
-              <a:rPr lang="en-US" sz="1320">
-                <a:solidFill>
-                  <a:srgbClr val="334155"/>
-                </a:solidFill>
-              </a:rPr>
-              <a:t>- Phone-first browsing works through compact cards and centered icon shortcuts.</a:t>
+              <a:t/>
+            </a:r>
+            <a:endParaRPr lang="en-US"/>
+          </a:p>
+          <a:p>
+            <a:r>
+              <a:rPr lang="en-US" sz="1320">
+                <a:solidFill>
+                  <a:srgbClr val="334155"/>
+                </a:solidFill>
+              </a:rPr>
+              <a:t/>
+            </a:r>
+            <a:endParaRPr lang="en-US"/>
+          </a:p>
+          <a:p>
+            <a:r>
+              <a:rPr lang="en-US" sz="1320">
+                <a:solidFill>
+                  <a:srgbClr val="334155"/>
+                </a:solidFill>
+              </a:rPr>
+              <a:t/>
+            </a:r>
+            <a:endParaRPr lang="en-US"/>
+          </a:p>
+        </p:txBody>
+      </p:sp>
+      <p:sp>
+        <p:nvSpPr>
+          <p:cNvPr id="20" name="Footer"/>
+          <p:cNvSpPr txBox="1"/>
+          <p:nvPr/>
+        </p:nvSpPr>
+        <p:spPr>
+          <a:xfrm>
+            <a:off x="530352" y="5833872"/>
+            <a:ext cx="4572000" cy="201168"/>
+          </a:xfrm>
+          <a:prstGeom prst="rect">
+            <a:avLst/>
+          </a:prstGeom>
+          <a:noFill/>
+          <a:ln>
+            <a:noFill/>
+          </a:ln>
+        </p:spPr>
+        <p:txBody>
+          <a:bodyPr wrap="square" lIns="91440" tIns="73152" rIns="91440" bIns="73152"/>
+          <a:lstStyle/>
+          <a:p>
+            <a:r>
+              <a:rPr lang="en-US" sz="850">
+                <a:solidFill>
+                  <a:srgbClr val="94A3B8"/>
+                </a:solidFill>
+              </a:rPr>
+              <a:t>Slide 7 of 12 | Rencipe Phase 1 demo plan</a:t>
             </a:r>
             <a:endParaRPr lang="en-US"/>
           </a:p>
@@ -3182,7 +3346,7 @@
       </p:sp>
       <p:pic>
         <p:nvPicPr>
-          <p:cNvPr id="9" name="ppt-search.png"/>
+          <p:cNvPr id="21" name="ppt-search.png"/>
           <p:cNvPicPr>
             <a:picLocks noChangeAspect="1"/>
           </p:cNvPicPr>
@@ -3211,7 +3375,7 @@
       </p:pic>
       <p:pic>
         <p:nvPicPr>
-          <p:cNvPr id="10" name="ppt-categories.png"/>
+          <p:cNvPr id="22" name="ppt-search-results.png"/>
           <p:cNvPicPr>
             <a:picLocks noChangeAspect="1"/>
           </p:cNvPicPr>
@@ -3238,41 +3402,6 @@
           </a:ln>
         </p:spPr>
       </p:pic>
-      <p:sp>
-        <p:nvSpPr>
-          <p:cNvPr id="20" name="Footer"/>
-          <p:cNvSpPr txBox="1"/>
-          <p:nvPr/>
-        </p:nvSpPr>
-        <p:spPr>
-          <a:xfrm>
-            <a:off x="530352" y="5833872"/>
-            <a:ext cx="4572000" cy="201168"/>
-          </a:xfrm>
-          <a:prstGeom prst="rect">
-            <a:avLst/>
-          </a:prstGeom>
-          <a:noFill/>
-          <a:ln>
-            <a:noFill/>
-          </a:ln>
-        </p:spPr>
-        <p:txBody>
-          <a:bodyPr wrap="square" lIns="91440" tIns="73152" rIns="91440" bIns="73152"/>
-          <a:lstStyle/>
-          <a:p>
-            <a:r>
-              <a:rPr lang="en-US" sz="850">
-                <a:solidFill>
-                  <a:srgbClr val="94A3B8"/>
-                </a:solidFill>
-              </a:rPr>
-              <a:t>Slide 7 of 12 | Rencipe Phase 1 demo plan</a:t>
-            </a:r>
-            <a:endParaRPr lang="en-US"/>
-          </a:p>
-        </p:txBody>
-      </p:sp>
     </p:spTree>
   </p:cSld>
   <p:clrMapOvr>
@@ -3282,7 +3411,7 @@
 </file>
 
 <file path=ppt/slides/slide8.xml><?xml version="1.0" encoding="utf-8"?>
-<p:sld xmlns:a="http://schemas.openxmlformats.org/drawingml/2006/main" xmlns:r="http://schemas.openxmlformats.org/officeDocument/2006/relationships" xmlns:p="http://schemas.openxmlformats.org/presentationml/2006/main">
+<p:sld xmlns:a="http://schemas.openxmlformats.org/drawingml/2006/main" xmlns:p="http://schemas.openxmlformats.org/presentationml/2006/main" xmlns:r="http://schemas.openxmlformats.org/officeDocument/2006/relationships">
   <p:cSld>
     <p:bg>
       <p:bgPr>
@@ -3335,7 +3464,7 @@
                   <a:srgbClr val="0F172A"/>
                 </a:solidFill>
               </a:rPr>
-              <a:t>Demo Flow 4: Saved Recipes and Cart</a:t>
+              <a:t>Demo Flow 4: Recipe Detail and Settings</a:t>
             </a:r>
             <a:endParaRPr lang="en-US"/>
           </a:p>
@@ -3370,7 +3499,7 @@
                   <a:srgbClr val="475569"/>
                 </a:solidFill>
               </a:rPr>
-              <a:t>Collect recipes before planning</a:t>
+              <a:t>Inspect a recipe, then show account identity</a:t>
             </a:r>
             <a:endParaRPr lang="en-US"/>
           </a:p>
@@ -3443,69 +3572,75 @@
                   <a:srgbClr val="0F172A"/>
                 </a:solidFill>
               </a:rPr>
-              <a:t>Show:</a:t>
-            </a:r>
-            <a:endParaRPr lang="en-US"/>
-          </a:p>
-          <a:p>
-            <a:r>
-              <a:rPr lang="en-US" sz="1320">
-                <a:solidFill>
-                  <a:srgbClr val="334155"/>
-                </a:solidFill>
-              </a:rPr>
-              <a:t>- Save/favorite a recipe from Home or recipe detail.</a:t>
-            </a:r>
-            <a:endParaRPr lang="en-US"/>
-          </a:p>
-          <a:p>
-            <a:r>
-              <a:rPr lang="en-US" sz="1320">
-                <a:solidFill>
-                  <a:srgbClr val="334155"/>
-                </a:solidFill>
-              </a:rPr>
-              <a:t>- Open Saved and search saved recipes.</a:t>
-            </a:r>
-            <a:endParaRPr lang="en-US"/>
-          </a:p>
-          <a:p>
-            <a:r>
-              <a:rPr lang="en-US" sz="1320">
-                <a:solidFill>
-                  <a:srgbClr val="334155"/>
-                </a:solidFill>
-              </a:rPr>
-              <a:t>- Add recipes to the cart from Home.</a:t>
-            </a:r>
-            <a:endParaRPr lang="en-US"/>
-          </a:p>
-          <a:p>
-            <a:r>
-              <a:rPr lang="en-US" sz="1320">
-                <a:solidFill>
-                  <a:srgbClr val="334155"/>
-                </a:solidFill>
-              </a:rPr>
-              <a:t>- Open the cart ingredient summary.</a:t>
-            </a:r>
-            <a:endParaRPr lang="en-US"/>
-          </a:p>
-          <a:p>
-            <a:r>
-              <a:rPr lang="en-US" sz="1320">
-                <a:solidFill>
-                  <a:srgbClr val="334155"/>
-                </a:solidFill>
-              </a:rPr>
-              <a:t>- Checkout cart items into a Meal Plan.</a:t>
+              <a:t>Show:
+1. Open the Miso Tofu Soup detail page.
+2. Show save/add/edit actions on the recipe.
+3. Open Settings and confirm the signed-in admin account.
+Talk about:
+- Recipe detail proves the app is not just a card list.
+- Settings confirms account-scoped data and demo identity.</a:t>
+            </a:r>
+            <a:endParaRPr lang="en-US"/>
+          </a:p>
+          <a:p>
+            <a:r>
+              <a:rPr lang="en-US" sz="1320">
+                <a:solidFill>
+                  <a:srgbClr val="334155"/>
+                </a:solidFill>
+              </a:rPr>
+              <a:t/>
+            </a:r>
+            <a:endParaRPr lang="en-US"/>
+          </a:p>
+          <a:p>
+            <a:r>
+              <a:rPr lang="en-US" sz="1320">
+                <a:solidFill>
+                  <a:srgbClr val="334155"/>
+                </a:solidFill>
+              </a:rPr>
+              <a:t/>
+            </a:r>
+            <a:endParaRPr lang="en-US"/>
+          </a:p>
+          <a:p>
+            <a:r>
+              <a:rPr lang="en-US" sz="1320">
+                <a:solidFill>
+                  <a:srgbClr val="334155"/>
+                </a:solidFill>
+              </a:rPr>
+              <a:t/>
+            </a:r>
+            <a:endParaRPr lang="en-US"/>
+          </a:p>
+          <a:p>
+            <a:r>
+              <a:rPr lang="en-US" sz="1320">
+                <a:solidFill>
+                  <a:srgbClr val="334155"/>
+                </a:solidFill>
+              </a:rPr>
+              <a:t/>
+            </a:r>
+            <a:endParaRPr lang="en-US"/>
+          </a:p>
+          <a:p>
+            <a:r>
+              <a:rPr lang="en-US" sz="1320">
+                <a:solidFill>
+                  <a:srgbClr val="334155"/>
+                </a:solidFill>
+              </a:rPr>
+              <a:t/>
             </a:r>
             <a:endParaRPr lang="en-US"/>
           </a:p>
           <a:p>
             <a:r>
               <a:rPr lang="en-US" sz="700"/>
-              <a:t> </a:t>
+              <a:t/>
             </a:r>
           </a:p>
           <a:p>
@@ -3515,18 +3650,53 @@
                   <a:srgbClr val="0F172A"/>
                 </a:solidFill>
               </a:rPr>
-              <a:t>Outcome to emphasize:</a:t>
-            </a:r>
-            <a:endParaRPr lang="en-US"/>
-          </a:p>
-          <a:p>
-            <a:r>
-              <a:rPr lang="en-US" sz="1320">
-                <a:solidFill>
-                  <a:srgbClr val="334155"/>
-                </a:solidFill>
-              </a:rPr>
-              <a:t>- Users can collect favorites and turn selected recipes into practical planning inputs.</a:t>
+              <a:t/>
+            </a:r>
+            <a:endParaRPr lang="en-US"/>
+          </a:p>
+          <a:p>
+            <a:r>
+              <a:rPr lang="en-US" sz="1320">
+                <a:solidFill>
+                  <a:srgbClr val="334155"/>
+                </a:solidFill>
+              </a:rPr>
+              <a:t/>
+            </a:r>
+            <a:endParaRPr lang="en-US"/>
+          </a:p>
+        </p:txBody>
+      </p:sp>
+      <p:sp>
+        <p:nvSpPr>
+          <p:cNvPr id="20" name="Footer"/>
+          <p:cNvSpPr txBox="1"/>
+          <p:nvPr/>
+        </p:nvSpPr>
+        <p:spPr>
+          <a:xfrm>
+            <a:off x="530352" y="5833872"/>
+            <a:ext cx="4572000" cy="201168"/>
+          </a:xfrm>
+          <a:prstGeom prst="rect">
+            <a:avLst/>
+          </a:prstGeom>
+          <a:noFill/>
+          <a:ln>
+            <a:noFill/>
+          </a:ln>
+        </p:spPr>
+        <p:txBody>
+          <a:bodyPr wrap="square" lIns="91440" tIns="73152" rIns="91440" bIns="73152"/>
+          <a:lstStyle/>
+          <a:p>
+            <a:r>
+              <a:rPr lang="en-US" sz="850">
+                <a:solidFill>
+                  <a:srgbClr val="94A3B8"/>
+                </a:solidFill>
+              </a:rPr>
+              <a:t>Slide 8 of 12 | Rencipe Phase 1 demo plan</a:t>
             </a:r>
             <a:endParaRPr lang="en-US"/>
           </a:p>
@@ -3534,7 +3704,7 @@
       </p:sp>
       <p:pic>
         <p:nvPicPr>
-          <p:cNvPr id="9" name="ppt-saved.png"/>
+          <p:cNvPr id="21" name="ppt-recipe-detail.png"/>
           <p:cNvPicPr>
             <a:picLocks noChangeAspect="1"/>
           </p:cNvPicPr>
@@ -3548,8 +3718,8 @@
         </p:blipFill>
         <p:spPr>
           <a:xfrm>
-            <a:off x="7083566" y="1143000"/>
-            <a:ext cx="2154907" cy="4663440"/>
+            <a:off x="5972256" y="1207008"/>
+            <a:ext cx="2091527" cy="4526280"/>
           </a:xfrm>
           <a:prstGeom prst="rect">
             <a:avLst/>
@@ -3561,41 +3731,35 @@
           </a:ln>
         </p:spPr>
       </p:pic>
-      <p:sp>
-        <p:nvSpPr>
-          <p:cNvPr id="20" name="Footer"/>
-          <p:cNvSpPr txBox="1"/>
-          <p:nvPr/>
-        </p:nvSpPr>
-        <p:spPr>
-          <a:xfrm>
-            <a:off x="530352" y="5833872"/>
-            <a:ext cx="4572000" cy="201168"/>
-          </a:xfrm>
-          <a:prstGeom prst="rect">
-            <a:avLst/>
-          </a:prstGeom>
-          <a:noFill/>
-          <a:ln>
-            <a:noFill/>
-          </a:ln>
-        </p:spPr>
-        <p:txBody>
-          <a:bodyPr wrap="square" lIns="91440" tIns="73152" rIns="91440" bIns="73152"/>
-          <a:lstStyle/>
-          <a:p>
-            <a:r>
-              <a:rPr lang="en-US" sz="850">
-                <a:solidFill>
-                  <a:srgbClr val="94A3B8"/>
-                </a:solidFill>
-              </a:rPr>
-              <a:t>Slide 8 of 12 | Rencipe Phase 1 demo plan</a:t>
-            </a:r>
-            <a:endParaRPr lang="en-US"/>
-          </a:p>
-        </p:txBody>
-      </p:sp>
+      <p:pic>
+        <p:nvPicPr>
+          <p:cNvPr id="22" name="ppt-settings.png"/>
+          <p:cNvPicPr>
+            <a:picLocks noChangeAspect="1"/>
+          </p:cNvPicPr>
+          <p:nvPr/>
+        </p:nvPicPr>
+        <p:blipFill>
+          <a:blip r:embed="rId3"/>
+          <a:stretch>
+            <a:fillRect/>
+          </a:stretch>
+        </p:blipFill>
+        <p:spPr>
+          <a:xfrm>
+            <a:off x="8303976" y="1207008"/>
+            <a:ext cx="2091527" cy="4526280"/>
+          </a:xfrm>
+          <a:prstGeom prst="rect">
+            <a:avLst/>
+          </a:prstGeom>
+          <a:ln w="9525">
+            <a:solidFill>
+              <a:srgbClr val="CBD5E1"/>
+            </a:solidFill>
+          </a:ln>
+        </p:spPr>
+      </p:pic>
     </p:spTree>
   </p:cSld>
   <p:clrMapOvr>
@@ -3605,7 +3769,7 @@
 </file>
 
 <file path=ppt/slides/slide9.xml><?xml version="1.0" encoding="utf-8"?>
-<p:sld xmlns:a="http://schemas.openxmlformats.org/drawingml/2006/main" xmlns:r="http://schemas.openxmlformats.org/officeDocument/2006/relationships" xmlns:p="http://schemas.openxmlformats.org/presentationml/2006/main">
+<p:sld xmlns:a="http://schemas.openxmlformats.org/drawingml/2006/main" xmlns:p="http://schemas.openxmlformats.org/presentationml/2006/main">
   <p:cSld>
     <p:bg>
       <p:bgPr>
@@ -3658,7 +3822,7 @@
                   <a:srgbClr val="0F172A"/>
                 </a:solidFill>
               </a:rPr>
-              <a:t>Demo Flow 5: Recipe Creation and Drafts</a:t>
+              <a:t>Recipe Basic Walkthrough</a:t>
             </a:r>
             <a:endParaRPr lang="en-US"/>
           </a:p>
@@ -3693,7 +3857,7 @@
                   <a:srgbClr val="475569"/>
                 </a:solidFill>
               </a:rPr>
-              <a:t>Recipe ownership and incomplete work protection</a:t>
+              <a:t>The exact screen order for presentation</a:t>
             </a:r>
             <a:endParaRPr lang="en-US"/>
           </a:p>
@@ -3731,7 +3895,7 @@
                   <a:srgbClr val="2563EB"/>
                 </a:solidFill>
               </a:rPr>
-              <a:t>12:00-14:00</a:t>
+              <a:t>12:00-13:30</a:t>
             </a:r>
             <a:endParaRPr lang="en-US"/>
           </a:p>
@@ -3766,58 +3930,66 @@
                   <a:srgbClr val="0F172A"/>
                 </a:solidFill>
               </a:rPr>
-              <a:t>Show:</a:t>
-            </a:r>
-            <a:endParaRPr lang="en-US"/>
-          </a:p>
-          <a:p>
-            <a:r>
-              <a:rPr lang="en-US" sz="1320">
-                <a:solidFill>
-                  <a:srgbClr val="334155"/>
-                </a:solidFill>
-              </a:rPr>
-              <a:t>- Create a new recipe with title, description, health tag, ingredients, steps, servings, and image.</a:t>
-            </a:r>
-            <a:endParaRPr lang="en-US"/>
-          </a:p>
-          <a:p>
-            <a:r>
-              <a:rPr lang="en-US" sz="1320">
-                <a:solidFill>
-                  <a:srgbClr val="334155"/>
-                </a:solidFill>
-              </a:rPr>
-              <a:t>- Let autosave capture the draft.</a:t>
-            </a:r>
-            <a:endParaRPr lang="en-US"/>
-          </a:p>
-          <a:p>
-            <a:r>
-              <a:rPr lang="en-US" sz="1320">
-                <a:solidFill>
-                  <a:srgbClr val="334155"/>
-                </a:solidFill>
-              </a:rPr>
-              <a:t>- Open My Drafts from Settings and resume the incomplete recipe.</a:t>
-            </a:r>
-            <a:endParaRPr lang="en-US"/>
-          </a:p>
-          <a:p>
-            <a:r>
-              <a:rPr lang="en-US" sz="1320">
-                <a:solidFill>
-                  <a:srgbClr val="334155"/>
-                </a:solidFill>
-              </a:rPr>
-              <a:t>- Publish after adding a cover image.</a:t>
+              <a:t>Recipe-basic order:
+1. Homepage
+2. Search page
+3. Searched view
+4. Recipe detail
+5. Settings page
+Speaker focus:
+- Discovery, search, recipe inspection, saved/cart state, and account identity.
+- Keep this segment crisp before moving into meal planning.</a:t>
+            </a:r>
+            <a:endParaRPr lang="en-US"/>
+          </a:p>
+          <a:p>
+            <a:r>
+              <a:rPr lang="en-US" sz="1320">
+                <a:solidFill>
+                  <a:srgbClr val="334155"/>
+                </a:solidFill>
+              </a:rPr>
+              <a:t/>
+            </a:r>
+            <a:endParaRPr lang="en-US"/>
+          </a:p>
+          <a:p>
+            <a:r>
+              <a:rPr lang="en-US" sz="1320">
+                <a:solidFill>
+                  <a:srgbClr val="334155"/>
+                </a:solidFill>
+              </a:rPr>
+              <a:t/>
+            </a:r>
+            <a:endParaRPr lang="en-US"/>
+          </a:p>
+          <a:p>
+            <a:r>
+              <a:rPr lang="en-US" sz="1320">
+                <a:solidFill>
+                  <a:srgbClr val="334155"/>
+                </a:solidFill>
+              </a:rPr>
+              <a:t/>
+            </a:r>
+            <a:endParaRPr lang="en-US"/>
+          </a:p>
+          <a:p>
+            <a:r>
+              <a:rPr lang="en-US" sz="1320">
+                <a:solidFill>
+                  <a:srgbClr val="334155"/>
+                </a:solidFill>
+              </a:rPr>
+              <a:t/>
             </a:r>
             <a:endParaRPr lang="en-US"/>
           </a:p>
           <a:p>
             <a:r>
               <a:rPr lang="en-US" sz="700"/>
-              <a:t> </a:t>
+              <a:t/>
             </a:r>
           </a:p>
           <a:p>
@@ -3827,29 +3999,29 @@
                   <a:srgbClr val="0F172A"/>
                 </a:solidFill>
               </a:rPr>
-              <a:t>Outcome to emphasize:</a:t>
-            </a:r>
-            <a:endParaRPr lang="en-US"/>
-          </a:p>
-          <a:p>
-            <a:r>
-              <a:rPr lang="en-US" sz="1320">
-                <a:solidFill>
-                  <a:srgbClr val="334155"/>
-                </a:solidFill>
-              </a:rPr>
-              <a:t>- Rencipe is not browse-only; users can maintain their own recipe data.</a:t>
-            </a:r>
-            <a:endParaRPr lang="en-US"/>
-          </a:p>
-          <a:p>
-            <a:r>
-              <a:rPr lang="en-US" sz="1320">
-                <a:solidFill>
-                  <a:srgbClr val="334155"/>
-                </a:solidFill>
-              </a:rPr>
-              <a:t>- Draft stability prevents losing in-progress work.</a:t>
+              <a:t/>
+            </a:r>
+            <a:endParaRPr lang="en-US"/>
+          </a:p>
+          <a:p>
+            <a:r>
+              <a:rPr lang="en-US" sz="1320">
+                <a:solidFill>
+                  <a:srgbClr val="334155"/>
+                </a:solidFill>
+              </a:rPr>
+              <a:t/>
+            </a:r>
+            <a:endParaRPr lang="en-US"/>
+          </a:p>
+          <a:p>
+            <a:r>
+              <a:rPr lang="en-US" sz="1320">
+                <a:solidFill>
+                  <a:srgbClr val="334155"/>
+                </a:solidFill>
+              </a:rPr>
+              <a:t/>
             </a:r>
             <a:endParaRPr lang="en-US"/>
           </a:p>
